--- a/activity/M02A01/M02A01.pptx
+++ b/activity/M02A01/M02A01.pptx
@@ -6912,7 +6912,7 @@
                 <a:latin typeface="Segoe UI Light" panose="020B0502040204020203" pitchFamily="34" charset="0"/>
                 <a:cs typeface="Segoe UI Light" panose="020B0502040204020203" pitchFamily="34" charset="0"/>
               </a:rPr>
-              <a:t>Revisar las diferentes opciones que tiene </a:t>
+              <a:t>revisar las diferentes opciones que tiene </a:t>
             </a:r>
             <a:r>
               <a:rPr lang="es-CO" sz="1400" dirty="0">

--- a/activity/M02A01/M02A01.pptx
+++ b/activity/M02A01/M02A01.pptx
@@ -5024,7 +5024,7 @@
         <p:spPr>
           <a:xfrm>
             <a:off x="382856" y="865815"/>
-            <a:ext cx="4581114" cy="5016758"/>
+            <a:ext cx="4581114" cy="4278094"/>
           </a:xfrm>
           <a:prstGeom prst="rect">
             <a:avLst/>
@@ -5115,41 +5115,6 @@
               </a:rPr>
               <a:t>” es todo lo contrario, son límites con los cuales puedo añadir vértices a la curva de nivel.</a:t>
             </a:r>
-          </a:p>
-          <a:p>
-            <a:pPr algn="just"/>
-            <a:endParaRPr lang="es-CO" sz="1600" dirty="0">
-              <a:latin typeface="Segoe UI Light" panose="020B0502040204020203" pitchFamily="34" charset="0"/>
-              <a:cs typeface="Segoe UI Light" panose="020B0502040204020203" pitchFamily="34" charset="0"/>
-            </a:endParaRPr>
-          </a:p>
-          <a:p>
-            <a:pPr algn="just"/>
-            <a:r>
-              <a:rPr lang="es-ES" sz="1600" dirty="0">
-                <a:latin typeface="Segoe UI Light" panose="020B0502040204020203" pitchFamily="34" charset="0"/>
-                <a:cs typeface="Segoe UI Light" panose="020B0502040204020203" pitchFamily="34" charset="0"/>
-              </a:rPr>
-              <a:t>Revisar las diferentes Opciones que tiene </a:t>
-            </a:r>
-            <a:r>
-              <a:rPr lang="es-CO" sz="1600" dirty="0">
-                <a:latin typeface="Segoe UI Light" panose="020B0502040204020203" pitchFamily="34" charset="0"/>
-                <a:cs typeface="Segoe UI Light" panose="020B0502040204020203" pitchFamily="34" charset="0"/>
-              </a:rPr>
-              <a:t>Autodesk Civil 3D</a:t>
-            </a:r>
-            <a:r>
-              <a:rPr lang="es-ES" sz="1600" dirty="0">
-                <a:latin typeface="Segoe UI Light" panose="020B0502040204020203" pitchFamily="34" charset="0"/>
-                <a:cs typeface="Segoe UI Light" panose="020B0502040204020203" pitchFamily="34" charset="0"/>
-              </a:rPr>
-              <a:t> para Generar Superficies TIN</a:t>
-            </a:r>
-            <a:endParaRPr lang="es-CO" sz="1600" dirty="0">
-              <a:latin typeface="Segoe UI Light" panose="020B0502040204020203" pitchFamily="34" charset="0"/>
-              <a:cs typeface="Segoe UI Light" panose="020B0502040204020203" pitchFamily="34" charset="0"/>
-            </a:endParaRPr>
           </a:p>
         </p:txBody>
       </p:sp>
@@ -6926,7 +6891,7 @@
                 <a:latin typeface="Segoe UI Light" panose="020B0502040204020203" pitchFamily="34" charset="0"/>
                 <a:cs typeface="Segoe UI Light" panose="020B0502040204020203" pitchFamily="34" charset="0"/>
               </a:rPr>
-              <a:t> para generar superficies TIN.</a:t>
+              <a:t> para generar y visualizar superficies TIN.</a:t>
             </a:r>
             <a:endParaRPr lang="es-CO" sz="1400" dirty="0">
               <a:latin typeface="Segoe UI Light" panose="020B0502040204020203" pitchFamily="34" charset="0"/>

--- a/activity/M02A01/M02A01.pptx
+++ b/activity/M02A01/M02A01.pptx
@@ -5071,21 +5071,7 @@
                 <a:latin typeface="Segoe UI Light" panose="020B0502040204020203" pitchFamily="34" charset="0"/>
                 <a:cs typeface="Segoe UI Light" panose="020B0502040204020203" pitchFamily="34" charset="0"/>
               </a:rPr>
-              <a:t>” define la cantidad de vértices que componen la curva de nivel que se tendrán en cuenta en la generación de la triangulación, esto en función de la distancia y/o del ángulo de deflexión entre líneas consecutivas. Autodesk Civil 3D no tendrá en cuenta vértices que estén a una cercanía menor que la estipulada. Es decir, si se tiene una polilínea (curva de nivel) conformada por </a:t>
-            </a:r>
-            <a:r>
-              <a:rPr lang="es-CO" sz="1600" dirty="0" err="1">
-                <a:latin typeface="Segoe UI Light" panose="020B0502040204020203" pitchFamily="34" charset="0"/>
-                <a:cs typeface="Segoe UI Light" panose="020B0502040204020203" pitchFamily="34" charset="0"/>
-              </a:rPr>
-              <a:t>por</a:t>
-            </a:r>
-            <a:r>
-              <a:rPr lang="es-CO" sz="1600" dirty="0">
-                <a:latin typeface="Segoe UI Light" panose="020B0502040204020203" pitchFamily="34" charset="0"/>
-                <a:cs typeface="Segoe UI Light" panose="020B0502040204020203" pitchFamily="34" charset="0"/>
-              </a:rPr>
-              <a:t> 4 vértices y dos vértices están a una distancia d &lt; L, donde L es la restricción que define el usuario, ese vértice no será tomado en cuenta hasta que d sea &gt; L. “</a:t>
+              <a:t>” define la cantidad de vértices que componen la curva de nivel que se tendrán en cuenta en la generación de la triangulación, esto en función de la distancia y/o del ángulo de deflexión entre líneas consecutivas. Autodesk Civil 3D no tendrá en cuenta vértices que estén a una cercanía menor que la estipulada. Es decir, si se tiene una polilínea (curva de nivel) conformada por 4 vértices y dos vértices están a una distancia d &lt; L, donde L es la restricción que define el usuario, ese vértice no será tomado en cuenta hasta que d sea &gt; L. “</a:t>
             </a:r>
             <a:r>
               <a:rPr lang="es-CO" sz="1600" dirty="0" err="1">
@@ -6436,35 +6422,35 @@
                 <a:latin typeface="Segoe UI Light" panose="020B0502040204020203" pitchFamily="34" charset="0"/>
                 <a:cs typeface="Segoe UI Light" panose="020B0502040204020203" pitchFamily="34" charset="0"/>
               </a:rPr>
-              <a:t>Usando ArcGIS® ArcMap o QGIS, cargue desde la capa de curvas de nivel base del proyecto /file/</a:t>
-            </a:r>
-            <a:r>
-              <a:rPr lang="es-CO" sz="1600" dirty="0" err="1">
+              <a:t>Usando ArcGIS® ArcMap o QGIS, cargue desde la capa de curvas de nivel base del proyecto </a:t>
+            </a:r>
+            <a:r>
+              <a:rPr lang="es-CO" sz="1600" i="1" dirty="0">
+                <a:latin typeface="Segoe UI Light" panose="020B0502040204020203" pitchFamily="34" charset="0"/>
+                <a:cs typeface="Segoe UI Light" panose="020B0502040204020203" pitchFamily="34" charset="0"/>
+              </a:rPr>
+              <a:t>/file/</a:t>
+            </a:r>
+            <a:r>
+              <a:rPr lang="es-CO" sz="1600" i="1" dirty="0" err="1">
                 <a:latin typeface="Segoe UI Light" panose="020B0502040204020203" pitchFamily="34" charset="0"/>
                 <a:cs typeface="Segoe UI Light" panose="020B0502040204020203" pitchFamily="34" charset="0"/>
               </a:rPr>
               <a:t>shp</a:t>
             </a:r>
             <a:r>
+              <a:rPr lang="es-CO" sz="1600" i="1" dirty="0">
+                <a:latin typeface="Segoe UI Light" panose="020B0502040204020203" pitchFamily="34" charset="0"/>
+                <a:cs typeface="Segoe UI Light" panose="020B0502040204020203" pitchFamily="34" charset="0"/>
+              </a:rPr>
+              <a:t>/CGG_CurvaNivelLidar_v0.shp</a:t>
+            </a:r>
+            <a:r>
               <a:rPr lang="es-CO" sz="1600" dirty="0">
                 <a:latin typeface="Segoe UI Light" panose="020B0502040204020203" pitchFamily="34" charset="0"/>
                 <a:cs typeface="Segoe UI Light" panose="020B0502040204020203" pitchFamily="34" charset="0"/>
               </a:rPr>
-              <a:t>/CGG_CurvaNivelLidar_v0.shp. Usando la herramienta de exportación, exporte el contenido de la capa a CAD, se recomienda Seleccionar </a:t>
-            </a:r>
-            <a:r>
-              <a:rPr lang="es-CO" sz="1600" dirty="0" err="1">
-                <a:latin typeface="Segoe UI Light" panose="020B0502040204020203" pitchFamily="34" charset="0"/>
-                <a:cs typeface="Segoe UI Light" panose="020B0502040204020203" pitchFamily="34" charset="0"/>
-              </a:rPr>
-              <a:t>DWG</a:t>
-            </a:r>
-            <a:r>
-              <a:rPr lang="es-CO" sz="1600" dirty="0">
-                <a:latin typeface="Segoe UI Light" panose="020B0502040204020203" pitchFamily="34" charset="0"/>
-                <a:cs typeface="Segoe UI Light" panose="020B0502040204020203" pitchFamily="34" charset="0"/>
-              </a:rPr>
-              <a:t> 2007. preferiblemente nombrar el archivo de salida con el mismo nombre que aparece en la base de datos del proyecto. </a:t>
+              <a:t>. Usando la herramienta de exportación, exporte el contenido de la capa a CAD, se recomienda seleccionar DWG 2007. preferiblemente nombrar el archivo de salida con el mismo nombre que aparece en la base de datos del proyecto. </a:t>
             </a:r>
           </a:p>
         </p:txBody>

--- a/activity/M02A01/M02A01.pptx
+++ b/activity/M02A01/M02A01.pptx
@@ -1403,7 +1403,7 @@
             <a:fld id="{53CE91DE-ABC6-4D22-89A0-1765B629FB43}" type="datetimeFigureOut">
               <a:rPr lang="es-CO" smtClean="0"/>
               <a:pPr/>
-              <a:t>29/07/2025</a:t>
+              <a:t>30/07/2025</a:t>
             </a:fld>
             <a:endParaRPr lang="es-CO"/>
           </a:p>
@@ -1856,7 +1856,7 @@
             <a:fld id="{43DF08CB-A55A-40B1-AEFD-F19B3CFD19B5}" type="datetimeFigureOut">
               <a:rPr lang="es-CO" smtClean="0"/>
               <a:pPr/>
-              <a:t>29/07/2025</a:t>
+              <a:t>30/07/2025</a:t>
             </a:fld>
             <a:endParaRPr lang="es-CO"/>
           </a:p>
@@ -2023,7 +2023,7 @@
             <a:fld id="{43DF08CB-A55A-40B1-AEFD-F19B3CFD19B5}" type="datetimeFigureOut">
               <a:rPr lang="es-CO" smtClean="0"/>
               <a:pPr/>
-              <a:t>29/07/2025</a:t>
+              <a:t>30/07/2025</a:t>
             </a:fld>
             <a:endParaRPr lang="es-CO"/>
           </a:p>
@@ -2200,7 +2200,7 @@
             <a:fld id="{43DF08CB-A55A-40B1-AEFD-F19B3CFD19B5}" type="datetimeFigureOut">
               <a:rPr lang="es-CO" smtClean="0"/>
               <a:pPr/>
-              <a:t>29/07/2025</a:t>
+              <a:t>30/07/2025</a:t>
             </a:fld>
             <a:endParaRPr lang="es-CO"/>
           </a:p>
@@ -2367,7 +2367,7 @@
             <a:fld id="{43DF08CB-A55A-40B1-AEFD-F19B3CFD19B5}" type="datetimeFigureOut">
               <a:rPr lang="es-CO" smtClean="0"/>
               <a:pPr/>
-              <a:t>29/07/2025</a:t>
+              <a:t>30/07/2025</a:t>
             </a:fld>
             <a:endParaRPr lang="es-CO"/>
           </a:p>
@@ -2610,7 +2610,7 @@
             <a:fld id="{43DF08CB-A55A-40B1-AEFD-F19B3CFD19B5}" type="datetimeFigureOut">
               <a:rPr lang="es-CO" smtClean="0"/>
               <a:pPr/>
-              <a:t>29/07/2025</a:t>
+              <a:t>30/07/2025</a:t>
             </a:fld>
             <a:endParaRPr lang="es-CO"/>
           </a:p>
@@ -2895,7 +2895,7 @@
             <a:fld id="{43DF08CB-A55A-40B1-AEFD-F19B3CFD19B5}" type="datetimeFigureOut">
               <a:rPr lang="es-CO" smtClean="0"/>
               <a:pPr/>
-              <a:t>29/07/2025</a:t>
+              <a:t>30/07/2025</a:t>
             </a:fld>
             <a:endParaRPr lang="es-CO"/>
           </a:p>
@@ -3314,7 +3314,7 @@
             <a:fld id="{43DF08CB-A55A-40B1-AEFD-F19B3CFD19B5}" type="datetimeFigureOut">
               <a:rPr lang="es-CO" smtClean="0"/>
               <a:pPr/>
-              <a:t>29/07/2025</a:t>
+              <a:t>30/07/2025</a:t>
             </a:fld>
             <a:endParaRPr lang="es-CO"/>
           </a:p>
@@ -3429,7 +3429,7 @@
             <a:fld id="{43DF08CB-A55A-40B1-AEFD-F19B3CFD19B5}" type="datetimeFigureOut">
               <a:rPr lang="es-CO" smtClean="0"/>
               <a:pPr/>
-              <a:t>29/07/2025</a:t>
+              <a:t>30/07/2025</a:t>
             </a:fld>
             <a:endParaRPr lang="es-CO"/>
           </a:p>
@@ -3521,7 +3521,7 @@
             <a:fld id="{43DF08CB-A55A-40B1-AEFD-F19B3CFD19B5}" type="datetimeFigureOut">
               <a:rPr lang="es-CO" smtClean="0"/>
               <a:pPr/>
-              <a:t>29/07/2025</a:t>
+              <a:t>30/07/2025</a:t>
             </a:fld>
             <a:endParaRPr lang="es-CO"/>
           </a:p>
@@ -3795,7 +3795,7 @@
             <a:fld id="{43DF08CB-A55A-40B1-AEFD-F19B3CFD19B5}" type="datetimeFigureOut">
               <a:rPr lang="es-CO" smtClean="0"/>
               <a:pPr/>
-              <a:t>29/07/2025</a:t>
+              <a:t>30/07/2025</a:t>
             </a:fld>
             <a:endParaRPr lang="es-CO"/>
           </a:p>
@@ -4045,7 +4045,7 @@
             <a:fld id="{43DF08CB-A55A-40B1-AEFD-F19B3CFD19B5}" type="datetimeFigureOut">
               <a:rPr lang="es-CO" smtClean="0"/>
               <a:pPr/>
-              <a:t>29/07/2025</a:t>
+              <a:t>30/07/2025</a:t>
             </a:fld>
             <a:endParaRPr lang="es-CO"/>
           </a:p>
@@ -4258,7 +4258,7 @@
             <a:fld id="{43DF08CB-A55A-40B1-AEFD-F19B3CFD19B5}" type="datetimeFigureOut">
               <a:rPr lang="es-CO" smtClean="0"/>
               <a:pPr/>
-              <a:t>29/07/2025</a:t>
+              <a:t>30/07/2025</a:t>
             </a:fld>
             <a:endParaRPr lang="es-CO"/>
           </a:p>
@@ -6422,7 +6422,7 @@
                 <a:latin typeface="Segoe UI Light" panose="020B0502040204020203" pitchFamily="34" charset="0"/>
                 <a:cs typeface="Segoe UI Light" panose="020B0502040204020203" pitchFamily="34" charset="0"/>
               </a:rPr>
-              <a:t>Usando ArcGIS® ArcMap o QGIS, cargue desde la capa de curvas de nivel base del proyecto </a:t>
+              <a:t>Usando ArcGIS® ArcMap o QGIS, cargue desde la capa de curvas de nivel completas o las recortadas del proyecto </a:t>
             </a:r>
             <a:r>
               <a:rPr lang="es-CO" sz="1600" i="1" dirty="0">
@@ -6443,14 +6443,56 @@
                 <a:latin typeface="Segoe UI Light" panose="020B0502040204020203" pitchFamily="34" charset="0"/>
                 <a:cs typeface="Segoe UI Light" panose="020B0502040204020203" pitchFamily="34" charset="0"/>
               </a:rPr>
-              <a:t>/CGG_CurvaNivelLidar_v0.shp</a:t>
+              <a:t>/CGG_CurvaNivelLidar_v1.shp</a:t>
             </a:r>
             <a:r>
               <a:rPr lang="es-CO" sz="1600" dirty="0">
                 <a:latin typeface="Segoe UI Light" panose="020B0502040204020203" pitchFamily="34" charset="0"/>
                 <a:cs typeface="Segoe UI Light" panose="020B0502040204020203" pitchFamily="34" charset="0"/>
               </a:rPr>
-              <a:t>. Usando la herramienta de exportación, exporte el contenido de la capa a CAD, se recomienda seleccionar DWG 2007. preferiblemente nombrar el archivo de salida con el mismo nombre que aparece en la base de datos del proyecto. </a:t>
+              <a:t>. Usando la herramienta de exportación, exporte el contenido de la capa a CAD, se recomienda seleccionar versión DWG 2007. Nombrar el archivo de salida con el mismo nombre de la capa de curvas del proyecto como </a:t>
+            </a:r>
+            <a:r>
+              <a:rPr lang="es-CO" sz="1600" i="1" dirty="0">
+                <a:latin typeface="Segoe UI Light" panose="020B0502040204020203" pitchFamily="34" charset="0"/>
+                <a:cs typeface="Segoe UI Light" panose="020B0502040204020203" pitchFamily="34" charset="0"/>
+              </a:rPr>
+              <a:t>/file/</a:t>
+            </a:r>
+            <a:r>
+              <a:rPr lang="es-CO" sz="1600" i="1" dirty="0" err="1">
+                <a:latin typeface="Segoe UI Light" panose="020B0502040204020203" pitchFamily="34" charset="0"/>
+                <a:cs typeface="Segoe UI Light" panose="020B0502040204020203" pitchFamily="34" charset="0"/>
+              </a:rPr>
+              <a:t>cad</a:t>
+            </a:r>
+            <a:r>
+              <a:rPr lang="es-CO" sz="1600" i="1" dirty="0">
+                <a:latin typeface="Segoe UI Light" panose="020B0502040204020203" pitchFamily="34" charset="0"/>
+                <a:cs typeface="Segoe UI Light" panose="020B0502040204020203" pitchFamily="34" charset="0"/>
+              </a:rPr>
+              <a:t>/</a:t>
+            </a:r>
+            <a:r>
+              <a:rPr lang="es-CO" sz="1600" i="1" dirty="0" err="1">
+                <a:latin typeface="Segoe UI Light" panose="020B0502040204020203" pitchFamily="34" charset="0"/>
+                <a:cs typeface="Segoe UI Light" panose="020B0502040204020203" pitchFamily="34" charset="0"/>
+              </a:rPr>
+              <a:t>acad</a:t>
+            </a:r>
+            <a:r>
+              <a:rPr lang="es-CO" sz="1600" i="1" dirty="0">
+                <a:latin typeface="Segoe UI Light" panose="020B0502040204020203" pitchFamily="34" charset="0"/>
+                <a:cs typeface="Segoe UI Light" panose="020B0502040204020203" pitchFamily="34" charset="0"/>
+              </a:rPr>
+              <a:t>/CGG_CurvaNivelLidar_v1.shp</a:t>
+            </a:r>
+            <a:r>
+              <a:rPr lang="es-CO" sz="1600" dirty="0">
+                <a:latin typeface="Segoe UI Light" panose="020B0502040204020203" pitchFamily="34" charset="0"/>
+                <a:cs typeface="Segoe UI Light" panose="020B0502040204020203" pitchFamily="34" charset="0"/>
+              </a:rPr>
+              <a:t>. </a:t>
             </a:r>
           </a:p>
         </p:txBody>
@@ -6768,8 +6810,8 @@
         </p:nvSpPr>
         <p:spPr>
           <a:xfrm>
-            <a:off x="767408" y="951398"/>
-            <a:ext cx="5904656" cy="4739759"/>
+            <a:off x="407368" y="476672"/>
+            <a:ext cx="6696744" cy="6093976"/>
           </a:xfrm>
           <a:prstGeom prst="rect">
             <a:avLst/>
@@ -6784,7 +6826,7 @@
           <a:p>
             <a:pPr algn="just"/>
             <a:r>
-              <a:rPr lang="es-CO" sz="1400" dirty="0">
+              <a:rPr lang="es-CO" sz="1500" dirty="0">
                 <a:latin typeface="Segoe UI Light" panose="020B0502040204020203" pitchFamily="34" charset="0"/>
                 <a:cs typeface="Segoe UI Light" panose="020B0502040204020203" pitchFamily="34" charset="0"/>
               </a:rPr>
@@ -6793,7 +6835,7 @@
           </a:p>
           <a:p>
             <a:pPr algn="just"/>
-            <a:endParaRPr lang="es-CO" sz="800" dirty="0">
+            <a:endParaRPr lang="es-CO" sz="1500" dirty="0">
               <a:latin typeface="Segoe UI Light" panose="020B0502040204020203" pitchFamily="34" charset="0"/>
               <a:cs typeface="Segoe UI Light" panose="020B0502040204020203" pitchFamily="34" charset="0"/>
             </a:endParaRPr>
@@ -6801,16 +6843,58 @@
           <a:p>
             <a:pPr algn="just"/>
             <a:r>
-              <a:rPr lang="es-CO" sz="1400" dirty="0">
-                <a:latin typeface="Segoe UI Light" panose="020B0502040204020203" pitchFamily="34" charset="0"/>
-                <a:cs typeface="Segoe UI Light" panose="020B0502040204020203" pitchFamily="34" charset="0"/>
-              </a:rPr>
-              <a:t>Es recomendable separar los triángulos TIN o curvas de nivel en líneas independientes, de este modo se puede tener certeza de usar los vértices de cada triángulo o curva como elemento para generar la superficie en Autodesk Civil 3D y que este modelo corresponda con el realizado en ArcMap. Para este proceso usaremos el comando EXPLODE; para un mejor flujo de trabajo es recomendable realizar esta operación en AutoCAD y posteriormente llevarlo a Autodesk Civil 3D.</a:t>
+              <a:rPr lang="es-CO" sz="1500" dirty="0">
+                <a:latin typeface="Segoe UI Light" panose="020B0502040204020203" pitchFamily="34" charset="0"/>
+                <a:cs typeface="Segoe UI Light" panose="020B0502040204020203" pitchFamily="34" charset="0"/>
+              </a:rPr>
+              <a:t>Es recomendable separar los triángulos TIN o curvas de nivel en líneas independientes, de este modo se puede tener certeza de usar los vértices de cada triángulo o curva como elemento para generar la superficie en Autodesk Civil 3D y que este modelo corresponda con el realizado en ArcMap. Para este proceso usaremos el comando EXPLODE; para un mejor flujo de trabajo es recomendable realizar esta operación en AutoCAD y posteriormente llevarlo a Autodesk Civil 3D. Nombrar el archivo explotado como </a:t>
+            </a:r>
+            <a:r>
+              <a:rPr lang="es-CO" sz="1500" i="1" dirty="0">
+                <a:latin typeface="Segoe UI Light" panose="020B0502040204020203" pitchFamily="34" charset="0"/>
+                <a:cs typeface="Segoe UI Light" panose="020B0502040204020203" pitchFamily="34" charset="0"/>
+              </a:rPr>
+              <a:t>/file/</a:t>
+            </a:r>
+            <a:r>
+              <a:rPr lang="es-CO" sz="1500" i="1" dirty="0" err="1">
+                <a:latin typeface="Segoe UI Light" panose="020B0502040204020203" pitchFamily="34" charset="0"/>
+                <a:cs typeface="Segoe UI Light" panose="020B0502040204020203" pitchFamily="34" charset="0"/>
+              </a:rPr>
+              <a:t>cad</a:t>
+            </a:r>
+            <a:r>
+              <a:rPr lang="es-CO" sz="1500" i="1" dirty="0">
+                <a:latin typeface="Segoe UI Light" panose="020B0502040204020203" pitchFamily="34" charset="0"/>
+                <a:cs typeface="Segoe UI Light" panose="020B0502040204020203" pitchFamily="34" charset="0"/>
+              </a:rPr>
+              <a:t>/</a:t>
+            </a:r>
+            <a:r>
+              <a:rPr lang="es-CO" sz="1500" i="1" dirty="0" err="1">
+                <a:latin typeface="Segoe UI Light" panose="020B0502040204020203" pitchFamily="34" charset="0"/>
+                <a:cs typeface="Segoe UI Light" panose="020B0502040204020203" pitchFamily="34" charset="0"/>
+              </a:rPr>
+              <a:t>acad</a:t>
+            </a:r>
+            <a:r>
+              <a:rPr lang="es-CO" sz="1500" i="1" dirty="0">
+                <a:latin typeface="Segoe UI Light" panose="020B0502040204020203" pitchFamily="34" charset="0"/>
+                <a:cs typeface="Segoe UI Light" panose="020B0502040204020203" pitchFamily="34" charset="0"/>
+              </a:rPr>
+              <a:t>/CGG_CurvaNivelLidar_v2.shp</a:t>
+            </a:r>
+            <a:r>
+              <a:rPr lang="es-CO" sz="1500" dirty="0">
+                <a:latin typeface="Segoe UI Light" panose="020B0502040204020203" pitchFamily="34" charset="0"/>
+                <a:cs typeface="Segoe UI Light" panose="020B0502040204020203" pitchFamily="34" charset="0"/>
+              </a:rPr>
+              <a:t>. </a:t>
             </a:r>
           </a:p>
           <a:p>
             <a:pPr algn="just"/>
-            <a:endParaRPr lang="es-CO" sz="1400" dirty="0">
+            <a:endParaRPr lang="es-CO" sz="1500" dirty="0">
               <a:latin typeface="Segoe UI Light" panose="020B0502040204020203" pitchFamily="34" charset="0"/>
               <a:cs typeface="Segoe UI Light" panose="020B0502040204020203" pitchFamily="34" charset="0"/>
             </a:endParaRPr>
@@ -6818,7 +6902,7 @@
           <a:p>
             <a:pPr algn="just"/>
             <a:r>
-              <a:rPr lang="es-CO" sz="1400" dirty="0">
+              <a:rPr lang="es-CO" sz="1500" dirty="0">
                 <a:latin typeface="Segoe UI Light" panose="020B0502040204020203" pitchFamily="34" charset="0"/>
                 <a:cs typeface="Segoe UI Light" panose="020B0502040204020203" pitchFamily="34" charset="0"/>
               </a:rPr>
@@ -6827,7 +6911,7 @@
           </a:p>
           <a:p>
             <a:pPr algn="just"/>
-            <a:endParaRPr lang="es-CO" sz="1400" dirty="0">
+            <a:endParaRPr lang="es-CO" sz="1500" dirty="0">
               <a:latin typeface="Segoe UI Light" panose="020B0502040204020203" pitchFamily="34" charset="0"/>
               <a:cs typeface="Segoe UI Light" panose="020B0502040204020203" pitchFamily="34" charset="0"/>
             </a:endParaRPr>
@@ -6835,51 +6919,95 @@
           <a:p>
             <a:pPr algn="just"/>
             <a:r>
-              <a:rPr lang="es-CO" sz="1400" dirty="0">
-                <a:latin typeface="Segoe UI Light" panose="020B0502040204020203" pitchFamily="34" charset="0"/>
-                <a:cs typeface="Segoe UI Light" panose="020B0502040204020203" pitchFamily="34" charset="0"/>
-              </a:rPr>
-              <a:t>Para crear el modelo TIN se debe definir en primer lugar la superficie, para luego incorporar en ella los elementos que la conforman. En la barra de menú “prospector” definimos y nombramos la superficie.</a:t>
+              <a:rPr lang="es-CO" sz="1500" dirty="0">
+                <a:latin typeface="Segoe UI Light" panose="020B0502040204020203" pitchFamily="34" charset="0"/>
+                <a:cs typeface="Segoe UI Light" panose="020B0502040204020203" pitchFamily="34" charset="0"/>
+              </a:rPr>
+              <a:t>Para crear el modelo TIN se debe definir en primer lugar la superficie, para luego incorporar en ella los elementos que la conforman. En la barra de menú “prospector” definimos y nombramos la superficie. </a:t>
             </a:r>
           </a:p>
           <a:p>
             <a:pPr algn="just"/>
-            <a:endParaRPr lang="es-CO" sz="1400" dirty="0">
+            <a:endParaRPr lang="es-CO" sz="1500" dirty="0">
               <a:latin typeface="Segoe UI Light" panose="020B0502040204020203" pitchFamily="34" charset="0"/>
               <a:cs typeface="Segoe UI Light" panose="020B0502040204020203" pitchFamily="34" charset="0"/>
             </a:endParaRPr>
           </a:p>
           <a:p>
+            <a:r>
+              <a:rPr lang="es-CO" sz="1500" dirty="0">
+                <a:latin typeface="Segoe UI Light" panose="020B0502040204020203" pitchFamily="34" charset="0"/>
+                <a:cs typeface="Segoe UI Light" panose="020B0502040204020203" pitchFamily="34" charset="0"/>
+              </a:rPr>
+              <a:t>Guarde el archivo de Autodesk Civil 3D de la </a:t>
+            </a:r>
+            <a:r>
+              <a:rPr lang="es-CO" sz="1500">
+                <a:latin typeface="Segoe UI Light" panose="020B0502040204020203" pitchFamily="34" charset="0"/>
+                <a:cs typeface="Segoe UI Light" panose="020B0502040204020203" pitchFamily="34" charset="0"/>
+              </a:rPr>
+              <a:t>superficie creada cómo: </a:t>
+            </a:r>
+            <a:r>
+              <a:rPr lang="es-CO" sz="1500" dirty="0">
+                <a:latin typeface="Segoe UI Light" panose="020B0502040204020203" pitchFamily="34" charset="0"/>
+                <a:cs typeface="Segoe UI Light" panose="020B0502040204020203" pitchFamily="34" charset="0"/>
+              </a:rPr>
+              <a:t>/file/</a:t>
+            </a:r>
+            <a:r>
+              <a:rPr lang="es-CO" sz="1500" dirty="0" err="1">
+                <a:latin typeface="Segoe UI Light" panose="020B0502040204020203" pitchFamily="34" charset="0"/>
+                <a:cs typeface="Segoe UI Light" panose="020B0502040204020203" pitchFamily="34" charset="0"/>
+              </a:rPr>
+              <a:t>cad</a:t>
+            </a:r>
+            <a:r>
+              <a:rPr lang="es-CO" sz="1500" dirty="0">
+                <a:latin typeface="Segoe UI Light" panose="020B0502040204020203" pitchFamily="34" charset="0"/>
+                <a:cs typeface="Segoe UI Light" panose="020B0502040204020203" pitchFamily="34" charset="0"/>
+              </a:rPr>
+              <a:t>/civil/Civil3D_MDT_Planicie_v1.dwg</a:t>
+            </a:r>
+          </a:p>
+          <a:p>
             <a:pPr algn="just"/>
-            <a:r>
-              <a:rPr lang="es-CO" sz="1400" dirty="0">
+            <a:endParaRPr lang="es-CO" sz="1500" dirty="0">
+              <a:latin typeface="Segoe UI Light" panose="020B0502040204020203" pitchFamily="34" charset="0"/>
+              <a:cs typeface="Segoe UI Light" panose="020B0502040204020203" pitchFamily="34" charset="0"/>
+            </a:endParaRPr>
+          </a:p>
+          <a:p>
+            <a:pPr algn="just"/>
+            <a:r>
+              <a:rPr lang="es-CO" sz="1500" dirty="0">
                 <a:latin typeface="Segoe UI Light" panose="020B0502040204020203" pitchFamily="34" charset="0"/>
                 <a:cs typeface="Segoe UI Light" panose="020B0502040204020203" pitchFamily="34" charset="0"/>
               </a:rPr>
               <a:t>Actividad individual: </a:t>
             </a:r>
             <a:r>
-              <a:rPr lang="es-ES" sz="1400" dirty="0">
+              <a:rPr lang="es-ES" sz="1500" dirty="0">
                 <a:latin typeface="Segoe UI Light" panose="020B0502040204020203" pitchFamily="34" charset="0"/>
                 <a:cs typeface="Segoe UI Light" panose="020B0502040204020203" pitchFamily="34" charset="0"/>
               </a:rPr>
               <a:t>revisar las diferentes opciones que tiene </a:t>
             </a:r>
             <a:r>
-              <a:rPr lang="es-CO" sz="1400" dirty="0">
+              <a:rPr lang="es-CO" sz="1500" dirty="0">
                 <a:latin typeface="Segoe UI Light" panose="020B0502040204020203" pitchFamily="34" charset="0"/>
                 <a:cs typeface="Segoe UI Light" panose="020B0502040204020203" pitchFamily="34" charset="0"/>
               </a:rPr>
               <a:t>Autodesk Civil 3D</a:t>
             </a:r>
             <a:r>
-              <a:rPr lang="es-ES" sz="1400" dirty="0">
+              <a:rPr lang="es-ES" sz="1500" dirty="0">
                 <a:latin typeface="Segoe UI Light" panose="020B0502040204020203" pitchFamily="34" charset="0"/>
                 <a:cs typeface="Segoe UI Light" panose="020B0502040204020203" pitchFamily="34" charset="0"/>
               </a:rPr>
               <a:t> para generar y visualizar superficies TIN.</a:t>
             </a:r>
-            <a:endParaRPr lang="es-CO" sz="1400" dirty="0">
+            <a:endParaRPr lang="es-CO" sz="1500" dirty="0">
               <a:latin typeface="Segoe UI Light" panose="020B0502040204020203" pitchFamily="34" charset="0"/>
               <a:cs typeface="Segoe UI Light" panose="020B0502040204020203" pitchFamily="34" charset="0"/>
             </a:endParaRPr>
@@ -7547,7 +7675,7 @@
                 <a:latin typeface="Segoe UI Light" panose="020B0502040204020203" pitchFamily="34" charset="0"/>
                 <a:cs typeface="Segoe UI Light" panose="020B0502040204020203" pitchFamily="34" charset="0"/>
               </a:rPr>
-              <a:t>lines</a:t>
+              <a:t>Lines</a:t>
             </a:r>
             <a:r>
               <a:rPr lang="es-CO" sz="1600" dirty="0">

--- a/activity/M02A01/M02A01.pptx
+++ b/activity/M02A01/M02A01.pptx
@@ -6402,8 +6402,8 @@
         </p:nvSpPr>
         <p:spPr>
           <a:xfrm>
-            <a:off x="1327200" y="509192"/>
-            <a:ext cx="9537600" cy="1077218"/>
+            <a:off x="1327200" y="421621"/>
+            <a:ext cx="9537600" cy="1323439"/>
           </a:xfrm>
           <a:prstGeom prst="rect">
             <a:avLst/>
@@ -6422,7 +6422,7 @@
                 <a:latin typeface="Segoe UI Light" panose="020B0502040204020203" pitchFamily="34" charset="0"/>
                 <a:cs typeface="Segoe UI Light" panose="020B0502040204020203" pitchFamily="34" charset="0"/>
               </a:rPr>
-              <a:t>Usando ArcGIS® ArcMap o QGIS, cargue desde la capa de curvas de nivel completas o las recortadas del proyecto </a:t>
+              <a:t>Usando ArcGIS® ArcMap o QGIS, cargue desde la capa de curvas de nivel completas v0 o las recortadas del proyecto </a:t>
             </a:r>
             <a:r>
               <a:rPr lang="es-CO" sz="1600" i="1" dirty="0">
@@ -6450,7 +6450,35 @@
                 <a:latin typeface="Segoe UI Light" panose="020B0502040204020203" pitchFamily="34" charset="0"/>
                 <a:cs typeface="Segoe UI Light" panose="020B0502040204020203" pitchFamily="34" charset="0"/>
               </a:rPr>
-              <a:t>. Usando la herramienta de exportación, exporte el contenido de la capa a CAD, se recomienda seleccionar versión DWG 2007. Nombrar el archivo de salida con el mismo nombre de la capa de curvas del proyecto como </a:t>
+              <a:t>. Usando la herramienta de exportación de QGIS, exporte el contenido de la capa de curvas de nivel (completas o recortadas) a CAD, se recomienda guardar en .</a:t>
+            </a:r>
+            <a:r>
+              <a:rPr lang="es-CO" sz="1600" dirty="0" err="1">
+                <a:latin typeface="Segoe UI Light" panose="020B0502040204020203" pitchFamily="34" charset="0"/>
+                <a:cs typeface="Segoe UI Light" panose="020B0502040204020203" pitchFamily="34" charset="0"/>
+              </a:rPr>
+              <a:t>dxf</a:t>
+            </a:r>
+            <a:r>
+              <a:rPr lang="es-CO" sz="1600" dirty="0">
+                <a:latin typeface="Segoe UI Light" panose="020B0502040204020203" pitchFamily="34" charset="0"/>
+                <a:cs typeface="Segoe UI Light" panose="020B0502040204020203" pitchFamily="34" charset="0"/>
+              </a:rPr>
+              <a:t> o en .</a:t>
+            </a:r>
+            <a:r>
+              <a:rPr lang="es-CO" sz="1600" dirty="0" err="1">
+                <a:latin typeface="Segoe UI Light" panose="020B0502040204020203" pitchFamily="34" charset="0"/>
+                <a:cs typeface="Segoe UI Light" panose="020B0502040204020203" pitchFamily="34" charset="0"/>
+              </a:rPr>
+              <a:t>dwg</a:t>
+            </a:r>
+            <a:r>
+              <a:rPr lang="es-CO" sz="1600" dirty="0">
+                <a:latin typeface="Segoe UI Light" panose="020B0502040204020203" pitchFamily="34" charset="0"/>
+                <a:cs typeface="Segoe UI Light" panose="020B0502040204020203" pitchFamily="34" charset="0"/>
+              </a:rPr>
+              <a:t> versión 2007. Nombrar el archivo de salida con el mismo nombre de la capa de curvas del proyecto como </a:t>
             </a:r>
             <a:r>
               <a:rPr lang="es-CO" sz="1600" i="1" dirty="0">
@@ -6485,7 +6513,7 @@
                 <a:latin typeface="Segoe UI Light" panose="020B0502040204020203" pitchFamily="34" charset="0"/>
                 <a:cs typeface="Segoe UI Light" panose="020B0502040204020203" pitchFamily="34" charset="0"/>
               </a:rPr>
-              <a:t>/CGG_CurvaNivelLidar_v1.shp</a:t>
+              <a:t>/CGG_CurvaNivelLidar_v1.dwg</a:t>
             </a:r>
             <a:r>
               <a:rPr lang="es-CO" sz="1600" dirty="0">
@@ -6939,21 +6967,7 @@
                 <a:latin typeface="Segoe UI Light" panose="020B0502040204020203" pitchFamily="34" charset="0"/>
                 <a:cs typeface="Segoe UI Light" panose="020B0502040204020203" pitchFamily="34" charset="0"/>
               </a:rPr>
-              <a:t>Guarde el archivo de Autodesk Civil 3D de la </a:t>
-            </a:r>
-            <a:r>
-              <a:rPr lang="es-CO" sz="1500">
-                <a:latin typeface="Segoe UI Light" panose="020B0502040204020203" pitchFamily="34" charset="0"/>
-                <a:cs typeface="Segoe UI Light" panose="020B0502040204020203" pitchFamily="34" charset="0"/>
-              </a:rPr>
-              <a:t>superficie creada cómo: </a:t>
-            </a:r>
-            <a:r>
-              <a:rPr lang="es-CO" sz="1500" dirty="0">
-                <a:latin typeface="Segoe UI Light" panose="020B0502040204020203" pitchFamily="34" charset="0"/>
-                <a:cs typeface="Segoe UI Light" panose="020B0502040204020203" pitchFamily="34" charset="0"/>
-              </a:rPr>
-              <a:t>/file/</a:t>
+              <a:t>Guarde el archivo de Autodesk Civil 3D de la superficie creada cómo: /file/</a:t>
             </a:r>
             <a:r>
               <a:rPr lang="es-CO" sz="1500" dirty="0" err="1">
